--- a/TLM/figures.pptx
+++ b/TLM/figures.pptx
@@ -10,9 +10,10 @@
     <p:sldId id="258" r:id="rId4"/>
     <p:sldId id="259" r:id="rId5"/>
     <p:sldId id="260" r:id="rId6"/>
+    <p:sldId id="261" r:id="rId7"/>
   </p:sldIdLst>
   <p:notesMasterIdLst>
-    <p:notesMasterId r:id="rId7"/>
+    <p:notesMasterId r:id="rId8"/>
   </p:notesMasterIdLst>
   <p:sldSz cx="9144000" cy="5143500"/>
   <p:notesSz cx="5143500" cy="9144000"/>
@@ -882,6 +883,94 @@
             <a:fld id="{F7021451-1387-4CA6-816F-3879F97B5CBC}" type="slidenum">
               <a:rPr lang="en-US"/>
               <a:t>5</a:t>
+            </a:fld>
+            <a:endParaRPr lang="en-US"/>
+          </a:p>
+        </p:txBody>
+      </p:sp>
+    </p:spTree>
+    <p:extLst>
+      <p:ext uri="{BB962C8B-B14F-4D97-AF65-F5344CB8AC3E}">
+        <p14:creationId xmlns:p14="http://schemas.microsoft.com/office/powerpoint/2010/main" val="1024086991"/>
+      </p:ext>
+    </p:extLst>
+  </p:cSld>
+  <p:clrMapOvr>
+    <a:masterClrMapping/>
+  </p:clrMapOvr>
+</p:notes>
+</file>
+
+<file path=ppt/notesSlides/notesSlide6.xml><?xml version="1.0" encoding="utf-8"?>
+<p:notes xmlns:a="http://schemas.openxmlformats.org/drawingml/2006/main" xmlns:r="http://schemas.openxmlformats.org/officeDocument/2006/relationships" xmlns:p="http://schemas.openxmlformats.org/presentationml/2006/main">
+  <p:cSld>
+    <p:spTree>
+      <p:nvGrpSpPr>
+        <p:cNvPr id="1" name=""/>
+        <p:cNvGrpSpPr/>
+        <p:nvPr/>
+      </p:nvGrpSpPr>
+      <p:grpSpPr>
+        <a:xfrm>
+          <a:off x="0" y="0"/>
+          <a:ext cx="0" cy="0"/>
+          <a:chOff x="0" y="0"/>
+          <a:chExt cx="0" cy="0"/>
+        </a:xfrm>
+      </p:grpSpPr>
+      <p:sp>
+        <p:nvSpPr>
+          <p:cNvPr id="2" name="Slide Image Placeholder 1"/>
+          <p:cNvSpPr>
+            <a:spLocks noGrp="1" noRot="1" noChangeAspect="1"/>
+          </p:cNvSpPr>
+          <p:nvPr>
+            <p:ph type="sldImg"/>
+          </p:nvPr>
+        </p:nvSpPr>
+        <p:spPr/>
+      </p:sp>
+      <p:sp>
+        <p:nvSpPr>
+          <p:cNvPr id="3" name="Notes Placeholder 2"/>
+          <p:cNvSpPr>
+            <a:spLocks noGrp="1"/>
+          </p:cNvSpPr>
+          <p:nvPr>
+            <p:ph type="body" idx="1"/>
+          </p:nvPr>
+        </p:nvSpPr>
+        <p:spPr/>
+        <p:txBody>
+          <a:bodyPr/>
+          <a:lstStyle/>
+          <a:p>
+            <a:r>
+              <a:rPr lang="en-US" dirty="0"/>
+              <a:t/>
+            </a:r>
+            <a:endParaRPr lang="en-US" dirty="0"/>
+          </a:p>
+        </p:txBody>
+      </p:sp>
+      <p:sp>
+        <p:nvSpPr>
+          <p:cNvPr id="4" name="Slide Number Placeholder 3"/>
+          <p:cNvSpPr>
+            <a:spLocks noGrp="1"/>
+          </p:cNvSpPr>
+          <p:nvPr>
+            <p:ph type="sldNum" sz="quarter" idx="10"/>
+          </p:nvPr>
+        </p:nvSpPr>
+        <p:spPr/>
+        <p:txBody>
+          <a:bodyPr/>
+          <a:lstStyle/>
+          <a:p>
+            <a:fld id="{F7021451-1387-4CA6-816F-3879F97B5CBC}" type="slidenum">
+              <a:rPr lang="en-US"/>
+              <a:t>6</a:t>
             </a:fld>
             <a:endParaRPr lang="en-US"/>
           </a:p>
@@ -8248,6 +8337,1104 @@
 </p:sld>
 </file>
 
+<file path=ppt/slides/slide6.xml><?xml version="1.0" encoding="utf-8"?>
+<p:sld xmlns:a="http://schemas.openxmlformats.org/drawingml/2006/main" xmlns:r="http://schemas.openxmlformats.org/officeDocument/2006/relationships" xmlns:p="http://schemas.openxmlformats.org/presentationml/2006/main">
+  <p:cSld name="Slide 6">
+    <p:spTree>
+      <p:nvGrpSpPr>
+        <p:cNvPr id="1" name=""/>
+        <p:cNvGrpSpPr/>
+        <p:nvPr/>
+      </p:nvGrpSpPr>
+      <p:grpSpPr>
+        <a:xfrm>
+          <a:off x="0" y="0"/>
+          <a:ext cx="0" cy="0"/>
+          <a:chOff x="0" y="0"/>
+          <a:chExt cx="0" cy="0"/>
+        </a:xfrm>
+      </p:grpSpPr>
+      <p:sp>
+        <p:nvSpPr>
+          <p:cNvPr id="2" name="Text 0"/>
+          <p:cNvSpPr/>
+          <p:nvPr/>
+        </p:nvSpPr>
+        <p:spPr>
+          <a:xfrm>
+            <a:off x="365760" y="201168"/>
+            <a:ext cx="8412480" cy="457200"/>
+          </a:xfrm>
+          <a:prstGeom prst="rect">
+            <a:avLst/>
+          </a:prstGeom>
+          <a:noFill/>
+          <a:ln/>
+        </p:spPr>
+        <p:txBody>
+          <a:bodyPr wrap="square" lIns="0" tIns="0" rIns="0" bIns="0" rtlCol="0" anchor="ctr"/>
+          <a:lstStyle/>
+          <a:p>
+            <a:pPr indent="0" marL="0">
+              <a:buNone/>
+            </a:pPr>
+            <a:r>
+              <a:rPr lang="en-US" sz="2200" b="1" dirty="0">
+                <a:solidFill>
+                  <a:srgbClr val="1F2937"/>
+                </a:solidFill>
+                <a:latin typeface="Arial" pitchFamily="34" charset="0"/>
+                <a:ea typeface="Arial" pitchFamily="34" charset="-122"/>
+                <a:cs typeface="Arial" pitchFamily="34" charset="-120"/>
+              </a:rPr>
+              <a:t>How to update these figures</a:t>
+            </a:r>
+            <a:endParaRPr lang="en-US" sz="2200" dirty="0"/>
+          </a:p>
+        </p:txBody>
+      </p:sp>
+      <p:sp>
+        <p:nvSpPr>
+          <p:cNvPr id="3" name="Shape 1"/>
+          <p:cNvSpPr/>
+          <p:nvPr/>
+        </p:nvSpPr>
+        <p:spPr>
+          <a:xfrm>
+            <a:off x="411480" y="868680"/>
+            <a:ext cx="4069080" cy="1874520"/>
+          </a:xfrm>
+          <a:prstGeom prst="rect">
+            <a:avLst/>
+          </a:prstGeom>
+          <a:solidFill>
+            <a:srgbClr val="F4F6F8"/>
+          </a:solidFill>
+          <a:ln w="12700">
+            <a:solidFill>
+              <a:srgbClr val="C7CDD4"/>
+            </a:solidFill>
+            <a:prstDash val="solid"/>
+          </a:ln>
+        </p:spPr>
+      </p:sp>
+      <p:sp>
+        <p:nvSpPr>
+          <p:cNvPr id="4" name="Text 2"/>
+          <p:cNvSpPr/>
+          <p:nvPr/>
+        </p:nvSpPr>
+        <p:spPr>
+          <a:xfrm>
+            <a:off x="566928" y="969264"/>
+            <a:ext cx="3749040" cy="256032"/>
+          </a:xfrm>
+          <a:prstGeom prst="rect">
+            <a:avLst/>
+          </a:prstGeom>
+          <a:noFill/>
+          <a:ln/>
+        </p:spPr>
+        <p:txBody>
+          <a:bodyPr wrap="square" lIns="0" tIns="0" rIns="0" bIns="0" rtlCol="0" anchor="ctr"/>
+          <a:lstStyle/>
+          <a:p>
+            <a:pPr algn="l" indent="0" marL="0">
+              <a:buNone/>
+            </a:pPr>
+            <a:r>
+              <a:rPr lang="en-US" sz="1200" b="1" dirty="0">
+                <a:solidFill>
+                  <a:srgbClr val="1F2937"/>
+                </a:solidFill>
+                <a:latin typeface="Arial" pitchFamily="34" charset="0"/>
+                <a:ea typeface="Arial" pitchFamily="34" charset="-122"/>
+                <a:cs typeface="Arial" pitchFamily="34" charset="-120"/>
+              </a:rPr>
+              <a:t>1  ·  Edit, then export</a:t>
+            </a:r>
+            <a:endParaRPr lang="en-US" sz="1200" dirty="0"/>
+          </a:p>
+        </p:txBody>
+      </p:sp>
+      <p:sp>
+        <p:nvSpPr>
+          <p:cNvPr id="5" name="Text 3"/>
+          <p:cNvSpPr/>
+          <p:nvPr/>
+        </p:nvSpPr>
+        <p:spPr>
+          <a:xfrm>
+            <a:off x="566928" y="1243584"/>
+            <a:ext cx="3794760" cy="502920"/>
+          </a:xfrm>
+          <a:prstGeom prst="rect">
+            <a:avLst/>
+          </a:prstGeom>
+          <a:noFill/>
+          <a:ln/>
+        </p:spPr>
+        <p:txBody>
+          <a:bodyPr wrap="square" lIns="0" tIns="0" rIns="0" bIns="0" rtlCol="0" anchor="ctr"/>
+          <a:lstStyle/>
+          <a:p>
+            <a:pPr algn="l" indent="0" marL="0">
+              <a:buNone/>
+            </a:pPr>
+            <a:r>
+              <a:rPr lang="en-US" sz="1050" dirty="0">
+                <a:solidFill>
+                  <a:srgbClr val="1F2937"/>
+                </a:solidFill>
+                <a:latin typeface="Arial" pitchFamily="34" charset="0"/>
+                <a:ea typeface="Arial" pitchFamily="34" charset="-122"/>
+                <a:cs typeface="Arial" pitchFamily="34" charset="-120"/>
+              </a:rPr>
+              <a:t>Edit any slide in this deck, then export every slide as JPEG</a:t>
+            </a:r>
+            <a:endParaRPr lang="en-US" sz="1050" dirty="0"/>
+          </a:p>
+          <a:p>
+            <a:pPr algn="l" indent="0" marL="0">
+              <a:buNone/>
+            </a:pPr>
+            <a:r>
+              <a:rPr lang="en-US" sz="1050" dirty="0">
+                <a:solidFill>
+                  <a:srgbClr val="1F2937"/>
+                </a:solidFill>
+                <a:latin typeface="Arial" pitchFamily="34" charset="0"/>
+                <a:ea typeface="Arial" pitchFamily="34" charset="-122"/>
+                <a:cs typeface="Arial" pitchFamily="34" charset="-120"/>
+              </a:rPr>
+              <a:t>at about 150 dpi  (File → Export → JPEG → All slides).</a:t>
+            </a:r>
+            <a:endParaRPr lang="en-US" sz="1050" dirty="0"/>
+          </a:p>
+        </p:txBody>
+      </p:sp>
+      <p:sp>
+        <p:nvSpPr>
+          <p:cNvPr id="6" name="Text 4"/>
+          <p:cNvSpPr/>
+          <p:nvPr/>
+        </p:nvSpPr>
+        <p:spPr>
+          <a:xfrm>
+            <a:off x="566928" y="1792224"/>
+            <a:ext cx="3794760" cy="411480"/>
+          </a:xfrm>
+          <a:prstGeom prst="rect">
+            <a:avLst/>
+          </a:prstGeom>
+          <a:noFill/>
+          <a:ln/>
+        </p:spPr>
+        <p:txBody>
+          <a:bodyPr wrap="square" lIns="0" tIns="0" rIns="0" bIns="0" rtlCol="0" anchor="ctr"/>
+          <a:lstStyle/>
+          <a:p>
+            <a:pPr algn="l" indent="0" marL="0">
+              <a:buNone/>
+            </a:pPr>
+            <a:r>
+              <a:rPr lang="en-US" sz="1000" i="1" dirty="0">
+                <a:solidFill>
+                  <a:srgbClr val="6B7280"/>
+                </a:solidFill>
+                <a:latin typeface="Arial" pitchFamily="34" charset="0"/>
+                <a:ea typeface="Arial" pitchFamily="34" charset="-122"/>
+                <a:cs typeface="Arial" pitchFamily="34" charset="-120"/>
+              </a:rPr>
+              <a:t>Simpler: run this in the TLM folder — it renders every slide</a:t>
+            </a:r>
+            <a:endParaRPr lang="en-US" sz="1000" dirty="0"/>
+          </a:p>
+          <a:p>
+            <a:pPr algn="l" indent="0" marL="0">
+              <a:buNone/>
+            </a:pPr>
+            <a:r>
+              <a:rPr lang="en-US" sz="1000" i="1" dirty="0">
+                <a:solidFill>
+                  <a:srgbClr val="6B7280"/>
+                </a:solidFill>
+                <a:latin typeface="Arial" pitchFamily="34" charset="0"/>
+                <a:ea typeface="Arial" pitchFamily="34" charset="-122"/>
+                <a:cs typeface="Arial" pitchFamily="34" charset="-120"/>
+              </a:rPr>
+              <a:t>and copies the JPEGs to both places for you:</a:t>
+            </a:r>
+            <a:endParaRPr lang="en-US" sz="1000" dirty="0"/>
+          </a:p>
+        </p:txBody>
+      </p:sp>
+      <p:sp>
+        <p:nvSpPr>
+          <p:cNvPr id="7" name="Text 5"/>
+          <p:cNvSpPr/>
+          <p:nvPr/>
+        </p:nvSpPr>
+        <p:spPr>
+          <a:xfrm>
+            <a:off x="566928" y="2249424"/>
+            <a:ext cx="3749040" cy="237744"/>
+          </a:xfrm>
+          <a:prstGeom prst="rect">
+            <a:avLst/>
+          </a:prstGeom>
+          <a:noFill/>
+          <a:ln/>
+        </p:spPr>
+        <p:txBody>
+          <a:bodyPr wrap="square" lIns="0" tIns="0" rIns="0" bIns="0" rtlCol="0" anchor="ctr"/>
+          <a:lstStyle/>
+          <a:p>
+            <a:pPr indent="0" marL="0">
+              <a:buNone/>
+            </a:pPr>
+            <a:r>
+              <a:rPr lang="en-US" sz="1050" b="1" dirty="0">
+                <a:solidFill>
+                  <a:srgbClr val="0F5132"/>
+                </a:solidFill>
+                <a:latin typeface="Courier New" pitchFamily="34" charset="0"/>
+                <a:ea typeface="Courier New" pitchFamily="34" charset="-122"/>
+                <a:cs typeface="Courier New" pitchFamily="34" charset="-120"/>
+              </a:rPr>
+              <a:t>./export_figures.sh</a:t>
+            </a:r>
+            <a:endParaRPr lang="en-US" sz="1050" dirty="0"/>
+          </a:p>
+        </p:txBody>
+      </p:sp>
+      <p:sp>
+        <p:nvSpPr>
+          <p:cNvPr id="8" name="Shape 6"/>
+          <p:cNvSpPr/>
+          <p:nvPr/>
+        </p:nvSpPr>
+        <p:spPr>
+          <a:xfrm>
+            <a:off x="4663440" y="868680"/>
+            <a:ext cx="4069080" cy="1874520"/>
+          </a:xfrm>
+          <a:prstGeom prst="rect">
+            <a:avLst/>
+          </a:prstGeom>
+          <a:solidFill>
+            <a:srgbClr val="F4F6F8"/>
+          </a:solidFill>
+          <a:ln w="12700">
+            <a:solidFill>
+              <a:srgbClr val="C7CDD4"/>
+            </a:solidFill>
+            <a:prstDash val="solid"/>
+          </a:ln>
+        </p:spPr>
+      </p:sp>
+      <p:sp>
+        <p:nvSpPr>
+          <p:cNvPr id="9" name="Text 7"/>
+          <p:cNvSpPr/>
+          <p:nvPr/>
+        </p:nvSpPr>
+        <p:spPr>
+          <a:xfrm>
+            <a:off x="4818888" y="969264"/>
+            <a:ext cx="3749040" cy="256032"/>
+          </a:xfrm>
+          <a:prstGeom prst="rect">
+            <a:avLst/>
+          </a:prstGeom>
+          <a:noFill/>
+          <a:ln/>
+        </p:spPr>
+        <p:txBody>
+          <a:bodyPr wrap="square" lIns="0" tIns="0" rIns="0" bIns="0" rtlCol="0" anchor="ctr"/>
+          <a:lstStyle/>
+          <a:p>
+            <a:pPr algn="l" indent="0" marL="0">
+              <a:buNone/>
+            </a:pPr>
+            <a:r>
+              <a:rPr lang="en-US" sz="1200" b="1" dirty="0">
+                <a:solidFill>
+                  <a:srgbClr val="1F2937"/>
+                </a:solidFill>
+                <a:latin typeface="Arial" pitchFamily="34" charset="0"/>
+                <a:ea typeface="Arial" pitchFamily="34" charset="-122"/>
+                <a:cs typeface="Arial" pitchFamily="34" charset="-120"/>
+              </a:rPr>
+              <a:t>2  ·  Save each JPEG in BOTH folders</a:t>
+            </a:r>
+            <a:endParaRPr lang="en-US" sz="1200" dirty="0"/>
+          </a:p>
+        </p:txBody>
+      </p:sp>
+      <p:sp>
+        <p:nvSpPr>
+          <p:cNvPr id="10" name="Text 8"/>
+          <p:cNvSpPr/>
+          <p:nvPr/>
+        </p:nvSpPr>
+        <p:spPr>
+          <a:xfrm>
+            <a:off x="4818888" y="1243584"/>
+            <a:ext cx="3794760" cy="411480"/>
+          </a:xfrm>
+          <a:prstGeom prst="rect">
+            <a:avLst/>
+          </a:prstGeom>
+          <a:noFill/>
+          <a:ln/>
+        </p:spPr>
+        <p:txBody>
+          <a:bodyPr wrap="square" lIns="0" tIns="0" rIns="0" bIns="0" rtlCol="0" anchor="ctr"/>
+          <a:lstStyle/>
+          <a:p>
+            <a:pPr algn="l" indent="0" marL="0">
+              <a:buNone/>
+            </a:pPr>
+            <a:r>
+              <a:rPr lang="en-US" sz="1050" dirty="0">
+                <a:solidFill>
+                  <a:srgbClr val="1F2937"/>
+                </a:solidFill>
+                <a:latin typeface="Arial" pitchFamily="34" charset="0"/>
+                <a:ea typeface="Arial" pitchFamily="34" charset="-122"/>
+                <a:cs typeface="Arial" pitchFamily="34" charset="-120"/>
+              </a:rPr>
+              <a:t>Same file name in each. Miss the second one and the website</a:t>
+            </a:r>
+            <a:endParaRPr lang="en-US" sz="1050" dirty="0"/>
+          </a:p>
+          <a:p>
+            <a:pPr algn="l" indent="0" marL="0">
+              <a:buNone/>
+            </a:pPr>
+            <a:r>
+              <a:rPr lang="en-US" sz="1050" dirty="0">
+                <a:solidFill>
+                  <a:srgbClr val="1F2937"/>
+                </a:solidFill>
+                <a:latin typeface="Arial" pitchFamily="34" charset="0"/>
+                <a:ea typeface="Arial" pitchFamily="34" charset="-122"/>
+                <a:cs typeface="Arial" pitchFamily="34" charset="-120"/>
+              </a:rPr>
+              <a:t>keeps showing the old picture.</a:t>
+            </a:r>
+            <a:endParaRPr lang="en-US" sz="1050" dirty="0"/>
+          </a:p>
+        </p:txBody>
+      </p:sp>
+      <p:sp>
+        <p:nvSpPr>
+          <p:cNvPr id="11" name="Text 9"/>
+          <p:cNvSpPr/>
+          <p:nvPr/>
+        </p:nvSpPr>
+        <p:spPr>
+          <a:xfrm>
+            <a:off x="4818888" y="1719072"/>
+            <a:ext cx="3749040" cy="237744"/>
+          </a:xfrm>
+          <a:prstGeom prst="rect">
+            <a:avLst/>
+          </a:prstGeom>
+          <a:noFill/>
+          <a:ln/>
+        </p:spPr>
+        <p:txBody>
+          <a:bodyPr wrap="square" lIns="0" tIns="0" rIns="0" bIns="0" rtlCol="0" anchor="ctr"/>
+          <a:lstStyle/>
+          <a:p>
+            <a:pPr indent="0" marL="0">
+              <a:buNone/>
+            </a:pPr>
+            <a:r>
+              <a:rPr lang="en-US" sz="1050" b="1" dirty="0">
+                <a:solidFill>
+                  <a:srgbClr val="1F2937"/>
+                </a:solidFill>
+                <a:latin typeface="Courier New" pitchFamily="34" charset="0"/>
+                <a:ea typeface="Courier New" pitchFamily="34" charset="-122"/>
+                <a:cs typeface="Courier New" pitchFamily="34" charset="-120"/>
+              </a:rPr>
+              <a:t>TLM/figures/&lt;name&gt;.jpg</a:t>
+            </a:r>
+            <a:endParaRPr lang="en-US" sz="1050" dirty="0"/>
+          </a:p>
+        </p:txBody>
+      </p:sp>
+      <p:sp>
+        <p:nvSpPr>
+          <p:cNvPr id="12" name="Text 10"/>
+          <p:cNvSpPr/>
+          <p:nvPr/>
+        </p:nvSpPr>
+        <p:spPr>
+          <a:xfrm>
+            <a:off x="4818888" y="1938528"/>
+            <a:ext cx="3749040" cy="256032"/>
+          </a:xfrm>
+          <a:prstGeom prst="rect">
+            <a:avLst/>
+          </a:prstGeom>
+          <a:noFill/>
+          <a:ln/>
+        </p:spPr>
+        <p:txBody>
+          <a:bodyPr wrap="square" lIns="0" tIns="0" rIns="0" bIns="0" rtlCol="0" anchor="ctr"/>
+          <a:lstStyle/>
+          <a:p>
+            <a:pPr algn="l" indent="0" marL="0">
+              <a:buNone/>
+            </a:pPr>
+            <a:r>
+              <a:rPr lang="en-US" sz="950" dirty="0">
+                <a:solidFill>
+                  <a:srgbClr val="6B7280"/>
+                </a:solidFill>
+                <a:latin typeface="Arial" pitchFamily="34" charset="0"/>
+                <a:ea typeface="Arial" pitchFamily="34" charset="-122"/>
+                <a:cs typeface="Arial" pitchFamily="34" charset="-120"/>
+              </a:rPr>
+              <a:t>used by the Jupyter notebook</a:t>
+            </a:r>
+            <a:endParaRPr lang="en-US" sz="950" dirty="0"/>
+          </a:p>
+        </p:txBody>
+      </p:sp>
+      <p:sp>
+        <p:nvSpPr>
+          <p:cNvPr id="13" name="Text 11"/>
+          <p:cNvSpPr/>
+          <p:nvPr/>
+        </p:nvSpPr>
+        <p:spPr>
+          <a:xfrm>
+            <a:off x="4818888" y="2194560"/>
+            <a:ext cx="3749040" cy="237744"/>
+          </a:xfrm>
+          <a:prstGeom prst="rect">
+            <a:avLst/>
+          </a:prstGeom>
+          <a:noFill/>
+          <a:ln/>
+        </p:spPr>
+        <p:txBody>
+          <a:bodyPr wrap="square" lIns="0" tIns="0" rIns="0" bIns="0" rtlCol="0" anchor="ctr"/>
+          <a:lstStyle/>
+          <a:p>
+            <a:pPr indent="0" marL="0">
+              <a:buNone/>
+            </a:pPr>
+            <a:r>
+              <a:rPr lang="en-US" sz="1050" b="1" dirty="0">
+                <a:solidFill>
+                  <a:srgbClr val="1F2937"/>
+                </a:solidFill>
+                <a:latin typeface="Courier New" pitchFamily="34" charset="0"/>
+                <a:ea typeface="Courier New" pitchFamily="34" charset="-122"/>
+                <a:cs typeface="Courier New" pitchFamily="34" charset="-120"/>
+              </a:rPr>
+              <a:t>docs/assets/&lt;name&gt;.jpg</a:t>
+            </a:r>
+            <a:endParaRPr lang="en-US" sz="1050" dirty="0"/>
+          </a:p>
+        </p:txBody>
+      </p:sp>
+      <p:sp>
+        <p:nvSpPr>
+          <p:cNvPr id="14" name="Text 12"/>
+          <p:cNvSpPr/>
+          <p:nvPr/>
+        </p:nvSpPr>
+        <p:spPr>
+          <a:xfrm>
+            <a:off x="4818888" y="2395728"/>
+            <a:ext cx="3749040" cy="256032"/>
+          </a:xfrm>
+          <a:prstGeom prst="rect">
+            <a:avLst/>
+          </a:prstGeom>
+          <a:noFill/>
+          <a:ln/>
+        </p:spPr>
+        <p:txBody>
+          <a:bodyPr wrap="square" lIns="0" tIns="0" rIns="0" bIns="0" rtlCol="0" anchor="ctr"/>
+          <a:lstStyle/>
+          <a:p>
+            <a:pPr algn="l" indent="0" marL="0">
+              <a:buNone/>
+            </a:pPr>
+            <a:r>
+              <a:rPr lang="en-US" sz="950" dirty="0">
+                <a:solidFill>
+                  <a:srgbClr val="6B7280"/>
+                </a:solidFill>
+                <a:latin typeface="Arial" pitchFamily="34" charset="0"/>
+                <a:ea typeface="Arial" pitchFamily="34" charset="-122"/>
+                <a:cs typeface="Arial" pitchFamily="34" charset="-120"/>
+              </a:rPr>
+              <a:t>used by the documentation website</a:t>
+            </a:r>
+            <a:endParaRPr lang="en-US" sz="950" dirty="0"/>
+          </a:p>
+        </p:txBody>
+      </p:sp>
+      <p:sp>
+        <p:nvSpPr>
+          <p:cNvPr id="15" name="Text 13"/>
+          <p:cNvSpPr/>
+          <p:nvPr/>
+        </p:nvSpPr>
+        <p:spPr>
+          <a:xfrm>
+            <a:off x="411480" y="2926080"/>
+            <a:ext cx="3657600" cy="256032"/>
+          </a:xfrm>
+          <a:prstGeom prst="rect">
+            <a:avLst/>
+          </a:prstGeom>
+          <a:noFill/>
+          <a:ln/>
+        </p:spPr>
+        <p:txBody>
+          <a:bodyPr wrap="square" lIns="0" tIns="0" rIns="0" bIns="0" rtlCol="0" anchor="ctr"/>
+          <a:lstStyle/>
+          <a:p>
+            <a:pPr algn="l" indent="0" marL="0">
+              <a:buNone/>
+            </a:pPr>
+            <a:r>
+              <a:rPr lang="en-US" sz="1200" b="1" dirty="0">
+                <a:solidFill>
+                  <a:srgbClr val="1F2937"/>
+                </a:solidFill>
+                <a:latin typeface="Arial" pitchFamily="34" charset="0"/>
+                <a:ea typeface="Arial" pitchFamily="34" charset="-122"/>
+                <a:cs typeface="Arial" pitchFamily="34" charset="-120"/>
+              </a:rPr>
+              <a:t>Slide → file name</a:t>
+            </a:r>
+            <a:endParaRPr lang="en-US" sz="1200" dirty="0"/>
+          </a:p>
+        </p:txBody>
+      </p:sp>
+      <p:sp>
+        <p:nvSpPr>
+          <p:cNvPr id="16" name="Shape 14"/>
+          <p:cNvSpPr/>
+          <p:nvPr/>
+        </p:nvSpPr>
+        <p:spPr>
+          <a:xfrm>
+            <a:off x="411480" y="3236976"/>
+            <a:ext cx="8321040" cy="274320"/>
+          </a:xfrm>
+          <a:prstGeom prst="rect">
+            <a:avLst/>
+          </a:prstGeom>
+          <a:solidFill>
+            <a:srgbClr val="F4F6F8"/>
+          </a:solidFill>
+          <a:ln w="12700">
+            <a:solidFill>
+              <a:srgbClr val="F4F6F8"/>
+            </a:solidFill>
+            <a:prstDash val="solid"/>
+          </a:ln>
+        </p:spPr>
+      </p:sp>
+      <p:sp>
+        <p:nvSpPr>
+          <p:cNvPr id="17" name="Text 15"/>
+          <p:cNvSpPr/>
+          <p:nvPr/>
+        </p:nvSpPr>
+        <p:spPr>
+          <a:xfrm>
+            <a:off x="566928" y="3236976"/>
+            <a:ext cx="1097280" cy="256032"/>
+          </a:xfrm>
+          <a:prstGeom prst="rect">
+            <a:avLst/>
+          </a:prstGeom>
+          <a:noFill/>
+          <a:ln/>
+        </p:spPr>
+        <p:txBody>
+          <a:bodyPr wrap="square" lIns="0" tIns="0" rIns="0" bIns="0" rtlCol="0" anchor="ctr"/>
+          <a:lstStyle/>
+          <a:p>
+            <a:pPr algn="l" indent="0" marL="0">
+              <a:buNone/>
+            </a:pPr>
+            <a:r>
+              <a:rPr lang="en-US" sz="1050" dirty="0">
+                <a:solidFill>
+                  <a:srgbClr val="6B7280"/>
+                </a:solidFill>
+                <a:latin typeface="Arial" pitchFamily="34" charset="0"/>
+                <a:ea typeface="Arial" pitchFamily="34" charset="-122"/>
+                <a:cs typeface="Arial" pitchFamily="34" charset="-120"/>
+              </a:rPr>
+              <a:t>Slide 1</a:t>
+            </a:r>
+            <a:endParaRPr lang="en-US" sz="1050" dirty="0"/>
+          </a:p>
+        </p:txBody>
+      </p:sp>
+      <p:sp>
+        <p:nvSpPr>
+          <p:cNvPr id="18" name="Text 16"/>
+          <p:cNvSpPr/>
+          <p:nvPr/>
+        </p:nvSpPr>
+        <p:spPr>
+          <a:xfrm>
+            <a:off x="1691640" y="3236976"/>
+            <a:ext cx="4114800" cy="237744"/>
+          </a:xfrm>
+          <a:prstGeom prst="rect">
+            <a:avLst/>
+          </a:prstGeom>
+          <a:noFill/>
+          <a:ln/>
+        </p:spPr>
+        <p:txBody>
+          <a:bodyPr wrap="square" lIns="0" tIns="0" rIns="0" bIns="0" rtlCol="0" anchor="ctr"/>
+          <a:lstStyle/>
+          <a:p>
+            <a:pPr indent="0" marL="0">
+              <a:buNone/>
+            </a:pPr>
+            <a:r>
+              <a:rPr lang="en-US" sz="1050" dirty="0">
+                <a:solidFill>
+                  <a:srgbClr val="1F2937"/>
+                </a:solidFill>
+                <a:latin typeface="Courier New" pitchFamily="34" charset="0"/>
+                <a:ea typeface="Courier New" pitchFamily="34" charset="-122"/>
+                <a:cs typeface="Courier New" pitchFamily="34" charset="-120"/>
+              </a:rPr>
+              <a:t>fig_tlm_resistance_chain.jpg</a:t>
+            </a:r>
+            <a:endParaRPr lang="en-US" sz="1050" dirty="0"/>
+          </a:p>
+        </p:txBody>
+      </p:sp>
+      <p:sp>
+        <p:nvSpPr>
+          <p:cNvPr id="19" name="Text 17"/>
+          <p:cNvSpPr/>
+          <p:nvPr/>
+        </p:nvSpPr>
+        <p:spPr>
+          <a:xfrm>
+            <a:off x="566928" y="3511296"/>
+            <a:ext cx="1097280" cy="256032"/>
+          </a:xfrm>
+          <a:prstGeom prst="rect">
+            <a:avLst/>
+          </a:prstGeom>
+          <a:noFill/>
+          <a:ln/>
+        </p:spPr>
+        <p:txBody>
+          <a:bodyPr wrap="square" lIns="0" tIns="0" rIns="0" bIns="0" rtlCol="0" anchor="ctr"/>
+          <a:lstStyle/>
+          <a:p>
+            <a:pPr algn="l" indent="0" marL="0">
+              <a:buNone/>
+            </a:pPr>
+            <a:r>
+              <a:rPr lang="en-US" sz="1050" dirty="0">
+                <a:solidFill>
+                  <a:srgbClr val="6B7280"/>
+                </a:solidFill>
+                <a:latin typeface="Arial" pitchFamily="34" charset="0"/>
+                <a:ea typeface="Arial" pitchFamily="34" charset="-122"/>
+                <a:cs typeface="Arial" pitchFamily="34" charset="-120"/>
+              </a:rPr>
+              <a:t>Slide 2</a:t>
+            </a:r>
+            <a:endParaRPr lang="en-US" sz="1050" dirty="0"/>
+          </a:p>
+        </p:txBody>
+      </p:sp>
+      <p:sp>
+        <p:nvSpPr>
+          <p:cNvPr id="20" name="Text 18"/>
+          <p:cNvSpPr/>
+          <p:nvPr/>
+        </p:nvSpPr>
+        <p:spPr>
+          <a:xfrm>
+            <a:off x="1691640" y="3511296"/>
+            <a:ext cx="4114800" cy="237744"/>
+          </a:xfrm>
+          <a:prstGeom prst="rect">
+            <a:avLst/>
+          </a:prstGeom>
+          <a:noFill/>
+          <a:ln/>
+        </p:spPr>
+        <p:txBody>
+          <a:bodyPr wrap="square" lIns="0" tIns="0" rIns="0" bIns="0" rtlCol="0" anchor="ctr"/>
+          <a:lstStyle/>
+          <a:p>
+            <a:pPr indent="0" marL="0">
+              <a:buNone/>
+            </a:pPr>
+            <a:r>
+              <a:rPr lang="en-US" sz="1050" dirty="0">
+                <a:solidFill>
+                  <a:srgbClr val="1F2937"/>
+                </a:solidFill>
+                <a:latin typeface="Courier New" pitchFamily="34" charset="0"/>
+                <a:ea typeface="Courier New" pitchFamily="34" charset="-122"/>
+                <a:cs typeface="Courier New" pitchFamily="34" charset="-120"/>
+              </a:rPr>
+              <a:t>fig_tlm_structure.jpg</a:t>
+            </a:r>
+            <a:endParaRPr lang="en-US" sz="1050" dirty="0"/>
+          </a:p>
+        </p:txBody>
+      </p:sp>
+      <p:sp>
+        <p:nvSpPr>
+          <p:cNvPr id="21" name="Shape 19"/>
+          <p:cNvSpPr/>
+          <p:nvPr/>
+        </p:nvSpPr>
+        <p:spPr>
+          <a:xfrm>
+            <a:off x="411480" y="3785616"/>
+            <a:ext cx="8321040" cy="274320"/>
+          </a:xfrm>
+          <a:prstGeom prst="rect">
+            <a:avLst/>
+          </a:prstGeom>
+          <a:solidFill>
+            <a:srgbClr val="F4F6F8"/>
+          </a:solidFill>
+          <a:ln w="12700">
+            <a:solidFill>
+              <a:srgbClr val="F4F6F8"/>
+            </a:solidFill>
+            <a:prstDash val="solid"/>
+          </a:ln>
+        </p:spPr>
+      </p:sp>
+      <p:sp>
+        <p:nvSpPr>
+          <p:cNvPr id="22" name="Text 20"/>
+          <p:cNvSpPr/>
+          <p:nvPr/>
+        </p:nvSpPr>
+        <p:spPr>
+          <a:xfrm>
+            <a:off x="566928" y="3785616"/>
+            <a:ext cx="1097280" cy="256032"/>
+          </a:xfrm>
+          <a:prstGeom prst="rect">
+            <a:avLst/>
+          </a:prstGeom>
+          <a:noFill/>
+          <a:ln/>
+        </p:spPr>
+        <p:txBody>
+          <a:bodyPr wrap="square" lIns="0" tIns="0" rIns="0" bIns="0" rtlCol="0" anchor="ctr"/>
+          <a:lstStyle/>
+          <a:p>
+            <a:pPr algn="l" indent="0" marL="0">
+              <a:buNone/>
+            </a:pPr>
+            <a:r>
+              <a:rPr lang="en-US" sz="1050" dirty="0">
+                <a:solidFill>
+                  <a:srgbClr val="6B7280"/>
+                </a:solidFill>
+                <a:latin typeface="Arial" pitchFamily="34" charset="0"/>
+                <a:ea typeface="Arial" pitchFamily="34" charset="-122"/>
+                <a:cs typeface="Arial" pitchFamily="34" charset="-120"/>
+              </a:rPr>
+              <a:t>Slide 3</a:t>
+            </a:r>
+            <a:endParaRPr lang="en-US" sz="1050" dirty="0"/>
+          </a:p>
+        </p:txBody>
+      </p:sp>
+      <p:sp>
+        <p:nvSpPr>
+          <p:cNvPr id="23" name="Text 21"/>
+          <p:cNvSpPr/>
+          <p:nvPr/>
+        </p:nvSpPr>
+        <p:spPr>
+          <a:xfrm>
+            <a:off x="1691640" y="3785616"/>
+            <a:ext cx="4114800" cy="237744"/>
+          </a:xfrm>
+          <a:prstGeom prst="rect">
+            <a:avLst/>
+          </a:prstGeom>
+          <a:noFill/>
+          <a:ln/>
+        </p:spPr>
+        <p:txBody>
+          <a:bodyPr wrap="square" lIns="0" tIns="0" rIns="0" bIns="0" rtlCol="0" anchor="ctr"/>
+          <a:lstStyle/>
+          <a:p>
+            <a:pPr indent="0" marL="0">
+              <a:buNone/>
+            </a:pPr>
+            <a:r>
+              <a:rPr lang="en-US" sz="1050" dirty="0">
+                <a:solidFill>
+                  <a:srgbClr val="1F2937"/>
+                </a:solidFill>
+                <a:latin typeface="Courier New" pitchFamily="34" charset="0"/>
+                <a:ea typeface="Courier New" pitchFamily="34" charset="-122"/>
+                <a:cs typeface="Courier New" pitchFamily="34" charset="-120"/>
+              </a:rPr>
+              <a:t>fig_tlm_crowding.jpg</a:t>
+            </a:r>
+            <a:endParaRPr lang="en-US" sz="1050" dirty="0"/>
+          </a:p>
+        </p:txBody>
+      </p:sp>
+      <p:sp>
+        <p:nvSpPr>
+          <p:cNvPr id="24" name="Text 22"/>
+          <p:cNvSpPr/>
+          <p:nvPr/>
+        </p:nvSpPr>
+        <p:spPr>
+          <a:xfrm>
+            <a:off x="566928" y="4059936"/>
+            <a:ext cx="1097280" cy="256032"/>
+          </a:xfrm>
+          <a:prstGeom prst="rect">
+            <a:avLst/>
+          </a:prstGeom>
+          <a:noFill/>
+          <a:ln/>
+        </p:spPr>
+        <p:txBody>
+          <a:bodyPr wrap="square" lIns="0" tIns="0" rIns="0" bIns="0" rtlCol="0" anchor="ctr"/>
+          <a:lstStyle/>
+          <a:p>
+            <a:pPr algn="l" indent="0" marL="0">
+              <a:buNone/>
+            </a:pPr>
+            <a:r>
+              <a:rPr lang="en-US" sz="1050" dirty="0">
+                <a:solidFill>
+                  <a:srgbClr val="6B7280"/>
+                </a:solidFill>
+                <a:latin typeface="Arial" pitchFamily="34" charset="0"/>
+                <a:ea typeface="Arial" pitchFamily="34" charset="-122"/>
+                <a:cs typeface="Arial" pitchFamily="34" charset="-120"/>
+              </a:rPr>
+              <a:t>Slide 4</a:t>
+            </a:r>
+            <a:endParaRPr lang="en-US" sz="1050" dirty="0"/>
+          </a:p>
+        </p:txBody>
+      </p:sp>
+      <p:sp>
+        <p:nvSpPr>
+          <p:cNvPr id="25" name="Text 23"/>
+          <p:cNvSpPr/>
+          <p:nvPr/>
+        </p:nvSpPr>
+        <p:spPr>
+          <a:xfrm>
+            <a:off x="1691640" y="4059936"/>
+            <a:ext cx="4114800" cy="237744"/>
+          </a:xfrm>
+          <a:prstGeom prst="rect">
+            <a:avLst/>
+          </a:prstGeom>
+          <a:noFill/>
+          <a:ln/>
+        </p:spPr>
+        <p:txBody>
+          <a:bodyPr wrap="square" lIns="0" tIns="0" rIns="0" bIns="0" rtlCol="0" anchor="ctr"/>
+          <a:lstStyle/>
+          <a:p>
+            <a:pPr indent="0" marL="0">
+              <a:buNone/>
+            </a:pPr>
+            <a:r>
+              <a:rPr lang="en-US" sz="1050" dirty="0">
+                <a:solidFill>
+                  <a:srgbClr val="1F2937"/>
+                </a:solidFill>
+                <a:latin typeface="Courier New" pitchFamily="34" charset="0"/>
+                <a:ea typeface="Courier New" pitchFamily="34" charset="-122"/>
+                <a:cs typeface="Courier New" pitchFamily="34" charset="-120"/>
+              </a:rPr>
+              <a:t>fig_tlm_plot.jpg</a:t>
+            </a:r>
+            <a:endParaRPr lang="en-US" sz="1050" dirty="0"/>
+          </a:p>
+        </p:txBody>
+      </p:sp>
+      <p:sp>
+        <p:nvSpPr>
+          <p:cNvPr id="26" name="Shape 24"/>
+          <p:cNvSpPr/>
+          <p:nvPr/>
+        </p:nvSpPr>
+        <p:spPr>
+          <a:xfrm>
+            <a:off x="411480" y="4334256"/>
+            <a:ext cx="8321040" cy="274320"/>
+          </a:xfrm>
+          <a:prstGeom prst="rect">
+            <a:avLst/>
+          </a:prstGeom>
+          <a:solidFill>
+            <a:srgbClr val="F4F6F8"/>
+          </a:solidFill>
+          <a:ln w="12700">
+            <a:solidFill>
+              <a:srgbClr val="F4F6F8"/>
+            </a:solidFill>
+            <a:prstDash val="solid"/>
+          </a:ln>
+        </p:spPr>
+      </p:sp>
+      <p:sp>
+        <p:nvSpPr>
+          <p:cNvPr id="27" name="Text 25"/>
+          <p:cNvSpPr/>
+          <p:nvPr/>
+        </p:nvSpPr>
+        <p:spPr>
+          <a:xfrm>
+            <a:off x="566928" y="4334256"/>
+            <a:ext cx="1097280" cy="256032"/>
+          </a:xfrm>
+          <a:prstGeom prst="rect">
+            <a:avLst/>
+          </a:prstGeom>
+          <a:noFill/>
+          <a:ln/>
+        </p:spPr>
+        <p:txBody>
+          <a:bodyPr wrap="square" lIns="0" tIns="0" rIns="0" bIns="0" rtlCol="0" anchor="ctr"/>
+          <a:lstStyle/>
+          <a:p>
+            <a:pPr algn="l" indent="0" marL="0">
+              <a:buNone/>
+            </a:pPr>
+            <a:r>
+              <a:rPr lang="en-US" sz="1050" dirty="0">
+                <a:solidFill>
+                  <a:srgbClr val="6B7280"/>
+                </a:solidFill>
+                <a:latin typeface="Arial" pitchFamily="34" charset="0"/>
+                <a:ea typeface="Arial" pitchFamily="34" charset="-122"/>
+                <a:cs typeface="Arial" pitchFamily="34" charset="-120"/>
+              </a:rPr>
+              <a:t>Slide 5</a:t>
+            </a:r>
+            <a:endParaRPr lang="en-US" sz="1050" dirty="0"/>
+          </a:p>
+        </p:txBody>
+      </p:sp>
+      <p:sp>
+        <p:nvSpPr>
+          <p:cNvPr id="28" name="Text 26"/>
+          <p:cNvSpPr/>
+          <p:nvPr/>
+        </p:nvSpPr>
+        <p:spPr>
+          <a:xfrm>
+            <a:off x="1691640" y="4334256"/>
+            <a:ext cx="4114800" cy="237744"/>
+          </a:xfrm>
+          <a:prstGeom prst="rect">
+            <a:avLst/>
+          </a:prstGeom>
+          <a:noFill/>
+          <a:ln/>
+        </p:spPr>
+        <p:txBody>
+          <a:bodyPr wrap="square" lIns="0" tIns="0" rIns="0" bIns="0" rtlCol="0" anchor="ctr"/>
+          <a:lstStyle/>
+          <a:p>
+            <a:pPr indent="0" marL="0">
+              <a:buNone/>
+            </a:pPr>
+            <a:r>
+              <a:rPr lang="en-US" sz="1050" dirty="0">
+                <a:solidFill>
+                  <a:srgbClr val="1F2937"/>
+                </a:solidFill>
+                <a:latin typeface="Courier New" pitchFamily="34" charset="0"/>
+                <a:ea typeface="Courier New" pitchFamily="34" charset="-122"/>
+                <a:cs typeface="Courier New" pitchFamily="34" charset="-120"/>
+              </a:rPr>
+              <a:t>fig_tlm_measurement.jpg</a:t>
+            </a:r>
+            <a:endParaRPr lang="en-US" sz="1050" dirty="0"/>
+          </a:p>
+        </p:txBody>
+      </p:sp>
+      <p:sp>
+        <p:nvSpPr>
+          <p:cNvPr id="29" name="Text 27"/>
+          <p:cNvSpPr/>
+          <p:nvPr/>
+        </p:nvSpPr>
+        <p:spPr>
+          <a:xfrm>
+            <a:off x="411480" y="4645152"/>
+            <a:ext cx="8321040" cy="411480"/>
+          </a:xfrm>
+          <a:prstGeom prst="rect">
+            <a:avLst/>
+          </a:prstGeom>
+          <a:noFill/>
+          <a:ln/>
+        </p:spPr>
+        <p:txBody>
+          <a:bodyPr wrap="square" lIns="0" tIns="0" rIns="0" bIns="0" rtlCol="0" anchor="ctr"/>
+          <a:lstStyle/>
+          <a:p>
+            <a:pPr algn="l" indent="0" marL="0">
+              <a:buNone/>
+            </a:pPr>
+            <a:r>
+              <a:rPr lang="en-US" sz="1000" i="1" dirty="0">
+                <a:solidFill>
+                  <a:srgbClr val="6B7280"/>
+                </a:solidFill>
+                <a:latin typeface="Arial" pitchFamily="34" charset="0"/>
+                <a:ea typeface="Arial" pitchFamily="34" charset="-122"/>
+                <a:cs typeface="Arial" pitchFamily="34" charset="-120"/>
+              </a:rPr>
+              <a:t>This .pptx is deliberately not tracked by git — it is your local working copy. The exported .jpg files are what the repository and the website use, so those are the ones to commit.</a:t>
+            </a:r>
+            <a:endParaRPr lang="en-US" sz="1000" dirty="0"/>
+          </a:p>
+        </p:txBody>
+      </p:sp>
+    </p:spTree>
+  </p:cSld>
+  <p:clrMapOvr>
+    <a:masterClrMapping/>
+  </p:clrMapOvr>
+</p:sld>
+</file>
+
 <file path=ppt/theme/theme1.xml><?xml version="1.0" encoding="utf-8"?>
 <a:theme xmlns:a="http://schemas.openxmlformats.org/drawingml/2006/main" name="Office Theme">
   <a:themeElements>
